--- a/library/seminars/sem-06/rendered/sem-06-n5.pptx
+++ b/library/seminars/sem-06/rendered/sem-06-n5.pptx
@@ -511,25 +511,13 @@
           <a:lstStyle/>
           <a:p>
             <a:r>
-              <a:t>Таблица перед вами, читать её вслух я не буду — пройдём по решению.</a:t>
+              <a:t>Четыре хода, один работает. Вернуться к одной роли на этом куске — честно, и цена названа: одновременность на трёх независимых кусках придётся отдать. Одна роль с широким описанием — возврат к широкому контексту и широким правам, от которых ступень отказалась в прошлом кейсе. Координатор — слой поверх двух уже не согласованных, цена растёт быстрее, чем снижается риск.</a:t>
             </a:r>
           </a:p>
           <a:p/>
           <a:p>
             <a:r>
-              <a:t>Два варианта выглядят разумно и оба слабее, чем кажутся. Третий, координатор: он добавляет слой координации к двум уже не согласованным, и цена растёт быстрее, чем снижается риск. Второй, объединить в одну роль с широким описанием: это возврат к широкому контексту и широким правам, от которых ступень отказалась ровно в прошлом кейсе.</a:t>
-            </a:r>
-          </a:p>
-          <a:p/>
-          <a:p>
-            <a:r>
-              <a:t>Работает четвёртый: расписать границы каждой роли явно, в обе стороны. И работает он тем же, чем работал приём четверга, — он называет условие вслух. Сам собой от появления второй роли он не берётся; это отдельное решение, которое принимают голосом.</a:t>
-            </a:r>
-          </a:p>
-          <a:p/>
-          <a:p>
-            <a:r>
-              <a:t>Отметьте, чего в таблице нет вовсе: варианта «добавить ещё ролей». Через экран увидите, во сколько он обходится на измерении.</a:t>
+              <a:t>Работает третий: расписать границы каждой роли явно, в обе стороны. И работает он тем же, чем работала раскладка в пятницу, — он называет условие вслух. Там мы сказали, какие куски независимы и почему. Здесь никто не сказал, где кончается зона каждой роли.</a:t>
             </a:r>
           </a:p>
           <a:p/>
@@ -552,7 +540,7 @@
               <a:t>Если спросят, почему здесь не повторяется голосование карточками.</a:t>
             </a:r>
             <a:r>
-              <a:t> Главное решение кейса — параллелить или нет — уже прошло голосованием на n46. Это разбор того, что делать с промежутком, когда параллельность уже выбрана; второе голосование по соседнему вопросу размыло бы первое.</a:t>
+              <a:t> Решение кейса — чем ускорять и на каком куске — уже прошло голосованием. Это итог того же спора, доведённый до разреза одного куска; второе голосование по соседнему вопросу размыло бы первое.</a:t>
             </a:r>
           </a:p>
           <a:p/>
@@ -562,7 +550,7 @@
               <a:t>Если спросят, когда координатор всё-таки оправдан.</a:t>
             </a:r>
             <a:r>
-              <a:t> Когда сверять вывод двух готовых ролей — это отдельная, названная заранее работа, заведённая до того, как появилась несогласованность. Разница проверяется одним вопросом: что координатор делает такого, чего обе роли не могут записать себе в описание. Если ответа нет, это заплатка.</a:t>
+              <a:t> Когда сверять вывод двух готовых ролей — отдельная, названная заранее работа, заведённая до того, как появилась несогласованность. Разница проверяется одним вопросом: что координатор делает такого, чего обе роли не могут записать себе в описание. Если ответа нет, это заплатка.</a:t>
             </a:r>
           </a:p>
           <a:p/>
@@ -572,7 +560,7 @@
               <a:t>Если спросят, не проще ли всегда возвращаться к одной роли.</a:t>
             </a:r>
             <a:r>
-              <a:t> На одной правке — часто проще и честнее. Пятый вариант не ошибочный, у него просто своя цена: там, где задач действительно несколько и они независимы, возврат к одной роли отдаёт ровно тот выигрыш, ради которого роли заводили в четверг.</a:t>
+              <a:t> На одном куске — часто проще и честнее. Первый ход не ошибочный, у него просто своя цена: там, где кусков несколько и они независимы, возврат к одной роли отдаёт ровно тот выигрыш, ради которого роли и заводили.</a:t>
             </a:r>
           </a:p>
           <a:p/>
@@ -582,7 +570,7 @@
               <a:t>Если спросят, как выглядит «расписать границы» на практике.</a:t>
             </a:r>
             <a:r>
-              <a:t> Одна строка в описании каждой роли, по-доменному: что входит в её проверку и что остаётся снаружи. Как именно — на следующем экране, на наших же двух ролях. Полезное правило при написании: границу пишут парой, обе строки сверяют рядом и вслух, иначе два автора независимо опишут один и тот же участок дважды или не опишут ни разу.</a:t>
+              <a:t> Одна строка в описании каждой роли, по-доменному: что входит в её проверку и что остаётся снаружи. Как именно — через экран, на наших же двух ролях. Полезное правило при написании: границу пишут парой, обе строки сверяют рядом и вслух, иначе два автора независимо опишут один и тот же участок дважды или не опишут ни разу.</a:t>
             </a:r>
           </a:p>
         </p:txBody>
@@ -779,13 +767,13 @@
           <a:lstStyle/>
           <a:p>
             <a:r>
-              <a:t>Диф-ревьюер и тестировщик работают без третьей роли, которая сверяла бы их согласованность. Вот что об этом говорит измерение на масштабе.</a:t>
+              <a:t>Диф-ревьюер и тестировщик работают без третьей роли, которая сверяла бы их согласованность. Вот что говорит измерение на масштабе.</a:t>
             </a:r>
           </a:p>
           <a:p/>
           <a:p>
             <a:r>
-              <a:t>Таксономия отказов мультиагентных систем: больше тысячи шестисот трасс, размеченных вручную, семь фреймворков, согласие между экспертами — ноль целых восемьдесят восемь. Провальных трасс от сорока одного до восьмидесяти семи процентов, в зависимости от фреймворка. Причины делятся на три: сорок два процента — спецификация задачи и роли, тридцать семь — рассогласование между агентами, двадцать один — верификация результата. Рассогласование здесь вторая причина по весу, почти вровень с первой.</a:t>
+              <a:t>Таксономия отказов мультиагентных систем: больше тысячи шестисот трасс, размеченных вручную, семь фреймворков, согласие между экспертами — ноль целых восемьдесят восемь. Провальных трасс от сорока одного до восьмидесяти семи процентов, по фреймворкам. Причины делятся на три: сорок два процента — спецификация задачи и роли, тридцать семь — рассогласование между агентами, двадцать один — верификация результата. Рассогласование — вторая причина по весу.</a:t>
             </a:r>
           </a:p>
           <a:p/>
@@ -797,7 +785,7 @@
           <a:p/>
           <a:p>
             <a:r>
-              <a:t>Честно: проверить рассогласование двух параллельных ролей ни на репозитории курса, ни на машине студента нечем. Это утверждение стоит на исследовании, не на команде, которую мы запустим.</a:t>
+              <a:t>Честно: проверить рассогласование двух параллельных ролей ни на репозитории курса, ни на машине студента нечем. Утверждение стоит на исследовании, не на команде, которую мы запустим.</a:t>
             </a:r>
           </a:p>
           <a:p/>
@@ -936,7 +924,7 @@
           <a:p/>
           <a:p>
             <a:r>
-              <a:t>И сразу честно о пределе приёма. Записанная в двух описаниях граница промежутка не убирает. Она делает его видимым тому, кто читает оба описания рядом. Увидеть его до показа заказчику остаётся работой человека — ровно той работой, которую в четверг делать было не нужно, потому что задачи лежали врозь сами.</a:t>
+              <a:t>И сразу честно о пределе приёма. Записанная в двух описаниях граница промежутка не убирает. Она делает его видимым тому, кто читает оба описания рядом. Увидеть его до показа заказчику остаётся работой человека — ровно той, которую на трёх независимых кусках делать было не нужно: они лежали врозь сами.</a:t>
             </a:r>
           </a:p>
           <a:p/>
@@ -1059,25 +1047,25 @@
           <a:lstStyle/>
           <a:p>
             <a:r>
-              <a:t>Где проходит черта, за которой координация сама становится ценой. Хорошая метка — отраслевой разворот: команда, год назад отвергавшая мультиагентность целиком и называвшая неструктурированный «рой» отвлекающим фактором, десять месяцев спустя вернулась к двум узким паттернам. Ревью-цепочка, где отдельная роль находит в среднем два бага на правку, около пятидесяти восьми процентов из них серьёзные, и связка двух разных топ-моделей на самых сложных сценариях. «Рой» без границ она и сейчас называет отвлекающим фактором.</a:t>
+              <a:t>Где черта, за которой координация сама становится ценой. Метка — отраслевой разворот: команда, год назад отвергавшая мультиагентность целиком и называвшая «рой» отвлекающим фактором, десять месяцев спустя вернулась к двум узким паттернам. Ревью-цепочка, где отдельная роль находит в среднем два бага на правку, около пятидесяти восьми процентов серьёзные, и связка двух разных топ-моделей. «Рой» без границ она называет отвлекающим фактором и сейчас.</a:t>
             </a:r>
           </a:p>
           <a:p/>
           <a:p>
             <a:r>
-              <a:t>Критерий — в таблице. Вторая роль оправдана, когда шаг одной не нуждается в выводе другой. Где шаги зависимы, разбиение рвёт связь, которую следующий шаг должен был увидеть, — отсюда семнадцать целых две десятых и четыре целых четыре десятых.</a:t>
+              <a:t>Критерий — в таблице. Роль оправдана, когда кусков несколько и шаг одного не нуждается в выводе другого. Где шаги зависимы — семнадцать целых две десятых и четыре целых четыре десятых. Где кусок повторяется — его место в проверке, которая гоняется сама. Где он к сроку не нужен — его сужают.</a:t>
             </a:r>
           </a:p>
           <a:p/>
           <a:p>
             <a:r>
-              <a:t>И чем всё кончилось у нашего разработчика. Он неделю делал всё в одну роль, по очереди, включая правки, которые спокойно делились. Баг у заказчика стоил часа, а недоверие к приёму — недели. Приём был рабочий; неверным оказался урок: он запомнил число ролей и не запомнил условие.</a:t>
+              <a:t>Чем кончилось у нашего разработчика. Неделю он делал всё в одну роль, по очереди, включая куски, которые спокойно делились. Баг у заказчика стоил часа, недоверие к приёму — недели. Счёт исполнителей он запомнил, условие под ним — нет.</a:t>
             </a:r>
           </a:p>
           <a:p/>
           <a:p>
             <a:r>
-              <a:t>Две причины заводить роль разобраны: чужое окно под чтение и одновременная работа на независимых задачах. Третья — про саму роль.</a:t>
+              <a:t>Две причины заводить роль разобраны: чужой контекст под чтение и одновременная работа на независимых кусках. Третья — про саму роль.</a:t>
             </a:r>
           </a:p>
           <a:p/>
@@ -1107,7 +1095,7 @@
           <a:p>
             <a:r>
               <a:rPr i="1"/>
-              <a:t>Если спросят про нашу сцену конкретно.</a:t>
+              <a:t>Если спросят про наш кусок конкретно.</a:t>
             </a:r>
             <a:r>
               <a:t> Код и поведение формы проверять параллельно было можно — отсюда решение оставить две роли, но с явно расписанными границами, вместо одной роли с широким описанием. Ошибкой стало молчание о разрезе между ними: разрез появился, а владельца у него не завели.</a:t>
@@ -1130,7 +1118,7 @@
               <a:t>Если спросят, чему учит потерянная неделя.</a:t>
             </a:r>
             <a:r>
-              <a:t> Тому, что провал приёма и провал урока, снятого с приёма, — разные вещи, и дороже обходится второй. Приём чинится одной строкой в описании роли; отказ от работающего приёма чинится только тем, что кто-то заново называет условие вслух.</a:t>
+              <a:t> Тому, что провал приёма и провал счёта, снятого с приёма, — разные вещи, и дороже обходится второй. Приём чинится одной строкой в описании роли; отказ от работающего приёма чинится только тем, что кто-то заново называет условие вслух.</a:t>
             </a:r>
           </a:p>
           <a:p/>
@@ -1304,13 +1292,13 @@
           <a:lstStyle/>
           <a:p>
             <a:r>
-              <a:t>Правка готова: разработчик попросил ужесточить проверку email в форме — старое поведение пропускало адрес без точки в домене, и такая заявка уже пришла от заказчика. Сессия, которая писала правку, проверяет её ещё раз сама, максимально внимательно. Ничего нового не находит: это тот же контекст рассуждений, с которым правка и писалась.</a:t>
+              <a:t>Правка готова: разработчик попросил ужесточить проверку email в форме — старое поведение пропускало адрес без точки в домене, и такая заявка уже пришла от заказчика. Сессия, которая писала правку, проверяет её сама и ничего нового не находит: это тот же контекст рассуждений, с которым правка и писалась.</a:t>
             </a:r>
           </a:p>
           <a:p/>
           <a:p>
             <a:r>
-              <a:t>Он просит проверить отдельным агентом. Работает немедленно, без единой строки настройки — агент получает задачу в собственном контекстном окне, истории рассуждений не видит, возвращает итог.</a:t>
+              <a:t>Он просит проверить отдельным агентом — делает так каждый раз с тех пор, как начал делегировать. Работает немедленно, без строки настройки: агент получает задачу в своём окне, истории рассуждений не видит, возвращает итог.</a:t>
             </a:r>
           </a:p>
           <a:p/>
@@ -4709,7 +4697,7 @@
                 </a:solidFill>
                 <a:latin typeface="Arial"/>
               </a:rPr>
-              <a:t>Пять вариантов для промежутка, рабочий — один</a:t>
+              <a:t>Промежуток: условие, которое никто не назвал вслух</a:t>
             </a:r>
           </a:p>
         </p:txBody>
@@ -4722,12 +4710,12 @@
         </p:nvSpPr>
         <p:spPr>
           <a:xfrm>
-            <a:off x="502920" y="963904"/>
-            <a:ext cx="11183112" cy="3661536"/>
+            <a:off x="502920" y="1184148"/>
+            <a:ext cx="11183112" cy="3131820"/>
           </a:xfrm>
           <a:prstGeom prst="roundRect">
             <a:avLst>
-              <a:gd name="adj" fmla="val 8324"/>
+              <a:gd name="adj" fmla="val 9732"/>
             </a:avLst>
           </a:prstGeom>
           <a:solidFill>
@@ -4770,8 +4758,8 @@
         </p:nvSpPr>
         <p:spPr>
           <a:xfrm>
-            <a:off x="685800" y="1146784"/>
-            <a:ext cx="1868454" cy="282067"/>
+            <a:off x="685800" y="1367028"/>
+            <a:ext cx="2132325" cy="282067"/>
           </a:xfrm>
           <a:prstGeom prst="rect">
             <a:avLst/>
@@ -4799,7 +4787,7 @@
                 </a:solidFill>
                 <a:latin typeface="Arial"/>
               </a:rPr>
-              <a:t>ВАРИАНТ</a:t>
+              <a:t>ХОД</a:t>
             </a:r>
           </a:p>
         </p:txBody>
@@ -4812,8 +4800,8 @@
         </p:nvSpPr>
         <p:spPr>
           <a:xfrm>
-            <a:off x="2700558" y="1146784"/>
-            <a:ext cx="3463396" cy="282067"/>
+            <a:off x="2964429" y="1367028"/>
+            <a:ext cx="3030719" cy="282067"/>
           </a:xfrm>
           <a:prstGeom prst="rect">
             <a:avLst/>
@@ -4854,8 +4842,8 @@
         </p:nvSpPr>
         <p:spPr>
           <a:xfrm>
-            <a:off x="6310258" y="1146784"/>
-            <a:ext cx="5046589" cy="282067"/>
+            <a:off x="6141453" y="1367028"/>
+            <a:ext cx="5215394" cy="282067"/>
           </a:xfrm>
           <a:prstGeom prst="rect">
             <a:avLst/>
@@ -4896,8 +4884,8 @@
         </p:nvSpPr>
         <p:spPr>
           <a:xfrm>
-            <a:off x="685800" y="1428851"/>
-            <a:ext cx="1868454" cy="529717"/>
+            <a:off x="685800" y="1649095"/>
+            <a:ext cx="2132325" cy="529717"/>
           </a:xfrm>
           <a:prstGeom prst="rect">
             <a:avLst/>
@@ -4925,7 +4913,7 @@
                 </a:solidFill>
                 <a:latin typeface="Arial"/>
               </a:rPr>
-              <a:t>ничего — два PASS надёжнее одного</a:t>
+              <a:t>вернуться к одной роли на этом куске</a:t>
             </a:r>
           </a:p>
         </p:txBody>
@@ -4938,8 +4926,8 @@
         </p:nvSpPr>
         <p:spPr>
           <a:xfrm>
-            <a:off x="2700558" y="1428851"/>
-            <a:ext cx="3463396" cy="529717"/>
+            <a:off x="2964429" y="1649095"/>
+            <a:ext cx="3030719" cy="529717"/>
           </a:xfrm>
           <a:prstGeom prst="rect">
             <a:avLst/>
@@ -4967,7 +4955,7 @@
                 </a:solidFill>
                 <a:latin typeface="Arial"/>
               </a:rPr>
-              <a:t>роли проверяют разное и вместе покрывают больше, чем любая одна</a:t>
+              <a:t>кусок неделимый, и один исполнитель видит его целиком</a:t>
             </a:r>
           </a:p>
         </p:txBody>
@@ -4980,8 +4968,8 @@
         </p:nvSpPr>
         <p:spPr>
           <a:xfrm>
-            <a:off x="6310258" y="1428851"/>
-            <a:ext cx="5046589" cy="529717"/>
+            <a:off x="6141453" y="1649095"/>
+            <a:ext cx="5215394" cy="529717"/>
           </a:xfrm>
           <a:prstGeom prst="rect">
             <a:avLst/>
@@ -5009,7 +4997,7 @@
                 </a:solidFill>
                 <a:latin typeface="Arial"/>
               </a:rPr>
-              <a:t>надёжность растёт, только пока между зонами нет промежутка — здесь он есть</a:t>
+              <a:t>отдаёт одновременность на тех трёх кусках, где она была</a:t>
             </a:r>
           </a:p>
         </p:txBody>
@@ -5022,7 +5010,7 @@
         </p:nvCxnSpPr>
         <p:spPr>
           <a:xfrm>
-            <a:off x="685800" y="1958568"/>
+            <a:off x="685800" y="2178812"/>
             <a:ext cx="10817352" cy="0"/>
           </a:xfrm>
           <a:prstGeom prst="line">
@@ -5057,8 +5045,8 @@
         </p:nvSpPr>
         <p:spPr>
           <a:xfrm>
-            <a:off x="685800" y="1958568"/>
-            <a:ext cx="1868454" cy="712279"/>
+            <a:off x="685800" y="2178812"/>
+            <a:ext cx="2132325" cy="712279"/>
           </a:xfrm>
           <a:prstGeom prst="rect">
             <a:avLst/>
@@ -5086,7 +5074,7 @@
                 </a:solidFill>
                 <a:latin typeface="Arial"/>
               </a:rPr>
-              <a:t>объединить в одну роль с широким описанием</a:t>
+              <a:t>одна роль с широким описанием на обе стороны</a:t>
             </a:r>
           </a:p>
         </p:txBody>
@@ -5099,8 +5087,8 @@
         </p:nvSpPr>
         <p:spPr>
           <a:xfrm>
-            <a:off x="2700558" y="1958568"/>
-            <a:ext cx="3463396" cy="712279"/>
+            <a:off x="2964429" y="2178812"/>
+            <a:ext cx="3030719" cy="712279"/>
           </a:xfrm>
           <a:prstGeom prst="rect">
             <a:avLst/>
@@ -5128,7 +5116,7 @@
                 </a:solidFill>
                 <a:latin typeface="Arial"/>
               </a:rPr>
-              <a:t>задача небольшая, одна роль успевает честно покрыть обе стороны</a:t>
+              <a:t>кусок небольшой, одна роль успевает честно покрыть обе стороны</a:t>
             </a:r>
           </a:p>
         </p:txBody>
@@ -5141,8 +5129,8 @@
         </p:nvSpPr>
         <p:spPr>
           <a:xfrm>
-            <a:off x="6310258" y="1958568"/>
-            <a:ext cx="5046589" cy="712279"/>
+            <a:off x="6141453" y="2178812"/>
+            <a:ext cx="5215394" cy="712279"/>
           </a:xfrm>
           <a:prstGeom prst="rect">
             <a:avLst/>
@@ -5170,7 +5158,7 @@
                 </a:solidFill>
                 <a:latin typeface="Arial"/>
               </a:rPr>
-              <a:t>широкое описание означает широкий контекст и широкие права — то самое, что узкий список инструментов и ограничивает</a:t>
+              <a:t>широкое описание означает широкий контекст и широкие права — то самое, что урезанный список инструментов и ограничивает</a:t>
             </a:r>
           </a:p>
         </p:txBody>
@@ -5183,7 +5171,7 @@
         </p:nvCxnSpPr>
         <p:spPr>
           <a:xfrm>
-            <a:off x="685800" y="2670848"/>
+            <a:off x="685800" y="2891091"/>
             <a:ext cx="10817352" cy="0"/>
           </a:xfrm>
           <a:prstGeom prst="line">
@@ -5218,8 +5206,8 @@
         </p:nvSpPr>
         <p:spPr>
           <a:xfrm>
-            <a:off x="685800" y="2670848"/>
-            <a:ext cx="1868454" cy="529717"/>
+            <a:off x="685800" y="2891091"/>
+            <a:ext cx="2132325" cy="712279"/>
           </a:xfrm>
           <a:prstGeom prst="rect">
             <a:avLst/>
@@ -5247,7 +5235,7 @@
                 </a:solidFill>
                 <a:latin typeface="Arial"/>
               </a:rPr>
-              <a:t>завести третью роль-координатора</a:t>
+              <a:t>расписать границы каждой роли в обе стороны</a:t>
             </a:r>
           </a:p>
         </p:txBody>
@@ -5260,8 +5248,8 @@
         </p:nvSpPr>
         <p:spPr>
           <a:xfrm>
-            <a:off x="2700558" y="2670848"/>
-            <a:ext cx="3463396" cy="529717"/>
+            <a:off x="2964429" y="2891091"/>
+            <a:ext cx="3030719" cy="712279"/>
           </a:xfrm>
           <a:prstGeom prst="rect">
             <a:avLst/>
@@ -5289,7 +5277,7 @@
                 </a:solidFill>
                 <a:latin typeface="Arial"/>
               </a:rPr>
-              <a:t>нужно сверять именно вывод двух готовых ролей</a:t>
+              <a:t>показывает промежуток между ними до того, как он проявится багом</a:t>
             </a:r>
           </a:p>
         </p:txBody>
@@ -5302,8 +5290,8 @@
         </p:nvSpPr>
         <p:spPr>
           <a:xfrm>
-            <a:off x="6310258" y="2670848"/>
-            <a:ext cx="5046589" cy="529717"/>
+            <a:off x="6141453" y="2891091"/>
+            <a:ext cx="5215394" cy="712279"/>
           </a:xfrm>
           <a:prstGeom prst="rect">
             <a:avLst/>
@@ -5331,7 +5319,7 @@
                 </a:solidFill>
                 <a:latin typeface="Arial"/>
               </a:rPr>
-              <a:t>добавляет слой координации к уже не согласованным двум — цена растёт быстрее, чем снижается риск</a:t>
+              <a:t>расписать нужно осознанно: от появления второй роли эта работа сама не делается</a:t>
             </a:r>
           </a:p>
         </p:txBody>
@@ -5344,7 +5332,7 @@
         </p:nvCxnSpPr>
         <p:spPr>
           <a:xfrm>
-            <a:off x="685800" y="3200565"/>
+            <a:off x="685800" y="3603370"/>
             <a:ext cx="10817352" cy="0"/>
           </a:xfrm>
           <a:prstGeom prst="line">
@@ -5379,8 +5367,8 @@
         </p:nvSpPr>
         <p:spPr>
           <a:xfrm>
-            <a:off x="685800" y="3200565"/>
-            <a:ext cx="1868454" cy="712279"/>
+            <a:off x="685800" y="3603370"/>
+            <a:ext cx="2132325" cy="529717"/>
           </a:xfrm>
           <a:prstGeom prst="rect">
             <a:avLst/>
@@ -5408,7 +5396,7 @@
                 </a:solidFill>
                 <a:latin typeface="Arial"/>
               </a:rPr>
-              <a:t>явно расписать границы каждой роли</a:t>
+              <a:t>завести третью роль-координатора</a:t>
             </a:r>
           </a:p>
         </p:txBody>
@@ -5421,8 +5409,8 @@
         </p:nvSpPr>
         <p:spPr>
           <a:xfrm>
-            <a:off x="2700558" y="3200565"/>
-            <a:ext cx="3463396" cy="712279"/>
+            <a:off x="2964429" y="3603370"/>
+            <a:ext cx="3030719" cy="529717"/>
           </a:xfrm>
           <a:prstGeom prst="rect">
             <a:avLst/>
@@ -5450,7 +5438,7 @@
                 </a:solidFill>
                 <a:latin typeface="Arial"/>
               </a:rPr>
-              <a:t>показывает промежуток между ними до того, как он проявится багом</a:t>
+              <a:t>сверяет вывод двух готовых ролей</a:t>
             </a:r>
           </a:p>
         </p:txBody>
@@ -5463,8 +5451,8 @@
         </p:nvSpPr>
         <p:spPr>
           <a:xfrm>
-            <a:off x="6310258" y="3200565"/>
-            <a:ext cx="5046589" cy="712279"/>
+            <a:off x="6141453" y="3603370"/>
+            <a:ext cx="5215394" cy="529717"/>
           </a:xfrm>
           <a:prstGeom prst="rect">
             <a:avLst/>
@@ -5492,182 +5480,21 @@
                 </a:solidFill>
                 <a:latin typeface="Arial"/>
               </a:rPr>
-              <a:t>расписать нужно осознанно — само появление второй роли этой работы не делает</a:t>
-            </a:r>
-          </a:p>
-        </p:txBody>
-      </p:sp>
-      <p:cxnSp>
-        <p:nvCxnSpPr>
-          <p:cNvPr id="22" name="Connector 21"/>
-          <p:cNvCxnSpPr/>
-          <p:nvPr/>
-        </p:nvCxnSpPr>
-        <p:spPr>
-          <a:xfrm>
-            <a:off x="685800" y="3912844"/>
-            <a:ext cx="10817352" cy="0"/>
-          </a:xfrm>
-          <a:prstGeom prst="line">
-            <a:avLst/>
-          </a:prstGeom>
-          <a:ln w="9525">
-            <a:solidFill>
-              <a:srgbClr val="E5EAF0"/>
-            </a:solidFill>
-          </a:ln>
-        </p:spPr>
-        <p:style>
-          <a:lnRef idx="2">
-            <a:schemeClr val="accent1"/>
-          </a:lnRef>
-          <a:fillRef idx="0">
-            <a:schemeClr val="accent1"/>
-          </a:fillRef>
-          <a:effectRef idx="1">
-            <a:schemeClr val="accent1"/>
-          </a:effectRef>
-          <a:fontRef idx="minor">
-            <a:schemeClr val="tx1"/>
-          </a:fontRef>
-        </p:style>
-      </p:cxnSp>
-      <p:sp>
-        <p:nvSpPr>
-          <p:cNvPr id="23" name="TextBox 22"/>
-          <p:cNvSpPr txBox="1"/>
-          <p:nvPr/>
-        </p:nvSpPr>
-        <p:spPr>
-          <a:xfrm>
-            <a:off x="685800" y="3912844"/>
-            <a:ext cx="1868454" cy="529717"/>
-          </a:xfrm>
-          <a:prstGeom prst="rect">
-            <a:avLst/>
-          </a:prstGeom>
-          <a:noFill/>
-        </p:spPr>
-        <p:txBody>
-          <a:bodyPr wrap="square" lIns="0" rIns="0" tIns="0" bIns="0" anchor="ctr">
-            <a:spAutoFit/>
-          </a:bodyPr>
-          <a:lstStyle/>
-          <a:p>
-            <a:pPr algn="l">
-              <a:lnSpc>
-                <a:spcPts val="1437"/>
-              </a:lnSpc>
-              <a:spcAft>
-                <a:spcPts val="0"/>
-              </a:spcAft>
-            </a:pPr>
-            <a:r>
-              <a:rPr sz="1250" b="0" i="0">
-                <a:solidFill>
-                  <a:srgbClr val="141B2E"/>
-                </a:solidFill>
-                <a:latin typeface="Arial"/>
-              </a:rPr>
-              <a:t>вернуться к одной роли</a:t>
-            </a:r>
-          </a:p>
-        </p:txBody>
-      </p:sp>
-      <p:sp>
-        <p:nvSpPr>
-          <p:cNvPr id="24" name="TextBox 23"/>
-          <p:cNvSpPr txBox="1"/>
-          <p:nvPr/>
-        </p:nvSpPr>
-        <p:spPr>
-          <a:xfrm>
-            <a:off x="2700558" y="3912844"/>
-            <a:ext cx="3463396" cy="529717"/>
-          </a:xfrm>
-          <a:prstGeom prst="rect">
-            <a:avLst/>
-          </a:prstGeom>
-          <a:noFill/>
-        </p:spPr>
-        <p:txBody>
-          <a:bodyPr wrap="square" lIns="0" rIns="0" tIns="0" bIns="0" anchor="ctr">
-            <a:spAutoFit/>
-          </a:bodyPr>
-          <a:lstStyle/>
-          <a:p>
-            <a:pPr algn="l">
-              <a:lnSpc>
-                <a:spcPts val="1437"/>
-              </a:lnSpc>
-              <a:spcAft>
-                <a:spcPts val="0"/>
-              </a:spcAft>
-            </a:pPr>
-            <a:r>
-              <a:rPr sz="1250" b="0" i="0">
-                <a:solidFill>
-                  <a:srgbClr val="141B2E"/>
-                </a:solidFill>
-                <a:latin typeface="Arial"/>
-              </a:rPr>
-              <a:t>подходит, когда шаг одной роли зависит от того, что увидела другая</a:t>
-            </a:r>
-          </a:p>
-        </p:txBody>
-      </p:sp>
-      <p:sp>
-        <p:nvSpPr>
-          <p:cNvPr id="25" name="TextBox 24"/>
-          <p:cNvSpPr txBox="1"/>
-          <p:nvPr/>
-        </p:nvSpPr>
-        <p:spPr>
-          <a:xfrm>
-            <a:off x="6310258" y="3912844"/>
-            <a:ext cx="5046589" cy="529717"/>
-          </a:xfrm>
-          <a:prstGeom prst="rect">
-            <a:avLst/>
-          </a:prstGeom>
-          <a:noFill/>
-        </p:spPr>
-        <p:txBody>
-          <a:bodyPr wrap="square" lIns="0" rIns="0" tIns="0" bIns="0" anchor="ctr">
-            <a:spAutoFit/>
-          </a:bodyPr>
-          <a:lstStyle/>
-          <a:p>
-            <a:pPr algn="l">
-              <a:lnSpc>
-                <a:spcPts val="1437"/>
-              </a:lnSpc>
-              <a:spcAft>
-                <a:spcPts val="0"/>
-              </a:spcAft>
-            </a:pPr>
-            <a:r>
-              <a:rPr sz="1250" b="0" i="0">
-                <a:solidFill>
-                  <a:srgbClr val="141B2E"/>
-                </a:solidFill>
-                <a:latin typeface="Arial"/>
-              </a:rPr>
-              <a:t>теряет параллельность там, где она была нужна ради скорости</a:t>
-            </a:r>
-          </a:p>
-        </p:txBody>
-      </p:sp>
-      <p:sp>
-        <p:nvSpPr>
-          <p:cNvPr id="26" name="Rounded Rectangle 25"/>
+              <a:t>добавляет слой координации к двум уже не согласованным — цена растёт быстрее, чем снижается риск</a:t>
+            </a:r>
+          </a:p>
+        </p:txBody>
+      </p:sp>
+      <p:sp>
+        <p:nvSpPr>
+          <p:cNvPr id="22" name="Rounded Rectangle 21"/>
           <p:cNvSpPr/>
           <p:nvPr/>
         </p:nvSpPr>
         <p:spPr>
           <a:xfrm>
-            <a:off x="502920" y="4841405"/>
-            <a:ext cx="82296" cy="1455420"/>
+            <a:off x="502920" y="4983479"/>
+            <a:ext cx="82296" cy="982980"/>
           </a:xfrm>
           <a:prstGeom prst="roundRect">
             <a:avLst>
@@ -5706,14 +5533,14 @@
       </p:sp>
       <p:sp>
         <p:nvSpPr>
-          <p:cNvPr id="27" name="TextBox 26"/>
+          <p:cNvPr id="23" name="TextBox 22"/>
           <p:cNvSpPr txBox="1"/>
           <p:nvPr/>
         </p:nvSpPr>
         <p:spPr>
           <a:xfrm>
-            <a:off x="859536" y="4969421"/>
-            <a:ext cx="10643616" cy="1199388"/>
+            <a:off x="859536" y="5111495"/>
+            <a:ext cx="10643616" cy="726948"/>
           </a:xfrm>
           <a:prstGeom prst="rect">
             <a:avLst/>
@@ -5750,14 +5577,14 @@
                 </a:solidFill>
                 <a:latin typeface="Arial"/>
               </a:rPr>
-              <a:t> Работает четвёртый вариант, и работает он тем же, чем работал приём четверга: он называет условие вслух. Третий добавляет роль ради проблемы, которую создали первые две. Второй возвращает к широкому доступу, от которого ступень уже отказалась. И отметьте, чего в таблице нет вовсе: варианта «добавить ещё ролей». На задаче, которая не делится, это ход в сторону, противоположную цели.</a:t>
-            </a:r>
-          </a:p>
-        </p:txBody>
-      </p:sp>
-      <p:sp>
-        <p:nvSpPr>
-          <p:cNvPr id="28" name="TextBox 27"/>
+              <a:t> В раскладке условие назвали вслух: сказали, какие куски независимы и почему. На разрезе одного куска его не назвал никто — разрез появился, владельца у него не завели. Работает третий ход, и работает он тем же, чем работала раскладка.</a:t>
+            </a:r>
+          </a:p>
+        </p:txBody>
+      </p:sp>
+      <p:sp>
+        <p:nvSpPr>
+          <p:cNvPr id="24" name="TextBox 23"/>
           <p:cNvSpPr txBox="1"/>
           <p:nvPr/>
         </p:nvSpPr>
@@ -7776,7 +7603,7 @@
         <p:spPr>
           <a:xfrm>
             <a:off x="502920" y="310896"/>
-            <a:ext cx="11183112" cy="807720"/>
+            <a:ext cx="11183112" cy="431291"/>
           </a:xfrm>
           <a:prstGeom prst="rect">
             <a:avLst/>
@@ -7804,7 +7631,7 @@
                 </a:solidFill>
                 <a:latin typeface="Arial"/>
               </a:rPr>
-              <a:t>Неделя по очереди — и где вторая роль всё-таки оправдана</a:t>
+              <a:t>Роль — одно средство из пяти. Где она оправдана</a:t>
             </a:r>
           </a:p>
         </p:txBody>
@@ -7817,8 +7644,8 @@
         </p:nvSpPr>
         <p:spPr>
           <a:xfrm>
-            <a:off x="502920" y="1319784"/>
-            <a:ext cx="82296" cy="1061720"/>
+            <a:off x="502920" y="943356"/>
+            <a:ext cx="82296" cy="1337310"/>
           </a:xfrm>
           <a:prstGeom prst="roundRect">
             <a:avLst>
@@ -7863,8 +7690,8 @@
         </p:nvSpPr>
         <p:spPr>
           <a:xfrm>
-            <a:off x="859536" y="1447800"/>
-            <a:ext cx="10643616" cy="805688"/>
+            <a:off x="859536" y="1071372"/>
+            <a:ext cx="10643616" cy="1081278"/>
           </a:xfrm>
           <a:prstGeom prst="rect">
             <a:avLst/>
@@ -7879,14 +7706,14 @@
           <a:p>
             <a:pPr algn="l">
               <a:lnSpc>
-                <a:spcPts val="1550"/>
+                <a:spcPts val="1673"/>
               </a:lnSpc>
               <a:spcAft>
                 <a:spcPts val="300"/>
               </a:spcAft>
             </a:pPr>
             <a:r>
-              <a:rPr sz="1250" b="1" i="0">
+              <a:rPr sz="1350" b="1" i="0">
                 <a:solidFill>
                   <a:srgbClr val="141B2E"/>
                 </a:solidFill>
@@ -7895,13 +7722,13 @@
               <a:t>Отраслевой разворот, как метка границы.</a:t>
             </a:r>
             <a:r>
-              <a:rPr sz="1250" b="1" i="0">
+              <a:rPr sz="1350" b="1" i="0">
                 <a:solidFill>
                   <a:srgbClr val="141B2E"/>
                 </a:solidFill>
                 <a:latin typeface="Arial"/>
               </a:rPr>
-              <a:t> Одна команда год назад полностью отвергала мультиагентность, называя неструктурированный «рой» отвлекающим фактором. Десять месяцев спустя она же вернулась к двум узким паттернам — ревью-цепочка (отдельная роль находит в среднем два бага на правку, из них около 58% серьёзных) и связка из двух разных топ-моделей на самых сложных сценариях. «Рой» без границ она по-прежнему называет отвлекающим фактором.</a:t>
+              <a:t> Одна команда год назад полностью отвергала мультиагентность, называя неструктурированный «рой» отвлекающим фактором. Десять месяцев спустя она же вернулась к двум узким паттернам — ревью-цепочка (отдельная роль находит в среднем два бага на правку, из них около 58% серьёзных) и связка из двух разных топ-моделей на сложных сценариях. «Рой» без границ она по-прежнему называет отвлекающим фактором.</a:t>
             </a:r>
           </a:p>
         </p:txBody>
@@ -7914,8 +7741,8 @@
         </p:nvSpPr>
         <p:spPr>
           <a:xfrm>
-            <a:off x="502920" y="2546096"/>
-            <a:ext cx="82296" cy="1187704"/>
+            <a:off x="502920" y="2445257"/>
+            <a:ext cx="82296" cy="1124712"/>
           </a:xfrm>
           <a:prstGeom prst="roundRect">
             <a:avLst>
@@ -7960,8 +7787,8 @@
         </p:nvSpPr>
         <p:spPr>
           <a:xfrm>
-            <a:off x="859536" y="2674112"/>
-            <a:ext cx="10643616" cy="931672"/>
+            <a:off x="859536" y="2573274"/>
+            <a:ext cx="10643616" cy="868680"/>
           </a:xfrm>
           <a:prstGeom prst="rect">
             <a:avLst/>
@@ -7976,14 +7803,14 @@
           <a:p>
             <a:pPr algn="l">
               <a:lnSpc>
-                <a:spcPts val="1798"/>
+                <a:spcPts val="1673"/>
               </a:lnSpc>
               <a:spcAft>
                 <a:spcPts val="300"/>
               </a:spcAft>
             </a:pPr>
             <a:r>
-              <a:rPr sz="1450" b="1" i="0">
+              <a:rPr sz="1350" b="1" i="0">
                 <a:solidFill>
                   <a:srgbClr val="141B2E"/>
                 </a:solidFill>
@@ -7992,13 +7819,13 @@
               <a:t>Параллельность лежит в задаче.</a:t>
             </a:r>
             <a:r>
-              <a:rPr sz="1450" b="1" i="0">
+              <a:rPr sz="1350" b="1" i="0">
                 <a:solidFill>
                   <a:srgbClr val="141B2E"/>
                 </a:solidFill>
                 <a:latin typeface="Arial"/>
               </a:rPr>
-              <a:t> Интуиция считала исполнителей: больше ролей — быстрее и надёжнее. Проверка назвала условие: выигрыш есть там, где задачи независимы и границы между ними названы вслух. Нашему разработчику неверно снятый урок стоил недели работы по очереди — включая те правки, которые спокойно делились. Баг у заказчика стоил часа; доверие к приёму стоило недели.</a:t>
+              <a:t> Догадка считала исполнителей: шесть кусков — шесть исполнителей. Раскладка назвала условие: независимых кусков три, и каждому из остальных нужно своё средство. Нашему разработчику неверный счёт стоил недели работы по очереди — включая те куски, которые спокойно делились. Баг у заказчика стоил часа; доверие к приёму стоило недели.</a:t>
             </a:r>
           </a:p>
         </p:txBody>
@@ -8011,12 +7838,12 @@
         </p:nvSpPr>
         <p:spPr>
           <a:xfrm>
-            <a:off x="502920" y="3898392"/>
-            <a:ext cx="5454396" cy="1905000"/>
+            <a:off x="502920" y="3734562"/>
+            <a:ext cx="5454396" cy="2470912"/>
           </a:xfrm>
           <a:prstGeom prst="roundRect">
             <a:avLst>
-              <a:gd name="adj" fmla="val 15999"/>
+              <a:gd name="adj" fmla="val 12335"/>
             </a:avLst>
           </a:prstGeom>
           <a:solidFill>
@@ -8059,7 +7886,7 @@
         </p:nvSpPr>
         <p:spPr>
           <a:xfrm>
-            <a:off x="685800" y="4008120"/>
+            <a:off x="685800" y="3844290"/>
             <a:ext cx="5088636" cy="274320"/>
           </a:xfrm>
           <a:prstGeom prst="rect">
@@ -8088,7 +7915,7 @@
                 </a:solidFill>
                 <a:latin typeface="Arial"/>
               </a:rPr>
-              <a:t>ВТОРАЯ РОЛЬ ОПРАВДАНА, КОГДА</a:t>
+              <a:t>РОЛЬ ОПРАВДАНА, КОГДА</a:t>
             </a:r>
           </a:p>
         </p:txBody>
@@ -8101,7 +7928,7 @@
         </p:nvSpPr>
         <p:spPr>
           <a:xfrm>
-            <a:off x="685800" y="4282440"/>
+            <a:off x="685800" y="4118610"/>
             <a:ext cx="5088636" cy="490982"/>
           </a:xfrm>
           <a:prstGeom prst="rect">
@@ -8130,7 +7957,7 @@
                 </a:solidFill>
                 <a:latin typeface="Arial"/>
               </a:rPr>
-              <a:t>задача действительно параллелится — шаг одной роли не нуждается в выводе другой</a:t>
+              <a:t>кусков несколько и они независимы — шаг одного не нуждается в выводе другого</a:t>
             </a:r>
           </a:p>
         </p:txBody>
@@ -8143,7 +7970,7 @@
         </p:nvCxnSpPr>
         <p:spPr>
           <a:xfrm>
-            <a:off x="685800" y="4773422"/>
+            <a:off x="685800" y="4609591"/>
             <a:ext cx="5088636" cy="0"/>
           </a:xfrm>
           <a:prstGeom prst="line">
@@ -8178,7 +8005,7 @@
         </p:nvSpPr>
         <p:spPr>
           <a:xfrm>
-            <a:off x="685800" y="4773422"/>
+            <a:off x="685800" y="4609591"/>
             <a:ext cx="5088636" cy="663321"/>
           </a:xfrm>
           <a:prstGeom prst="rect">
@@ -8207,7 +8034,7 @@
                 </a:solidFill>
                 <a:latin typeface="Arial"/>
               </a:rPr>
-              <a:t>узкая роль проверяет одну конкретную правку в своей зоне и этим окупается — диф-ревьюер и тестировщик из нашей сцены, ровно этот случай</a:t>
+              <a:t>у каждого куска своя узкая зона и короткий итог — диф-ревьюер и тестировщик ровно этот случай, когда кусков два</a:t>
             </a:r>
           </a:p>
         </p:txBody>
@@ -8220,12 +8047,12 @@
         </p:nvSpPr>
         <p:spPr>
           <a:xfrm>
-            <a:off x="6231636" y="3898392"/>
-            <a:ext cx="5454396" cy="1905000"/>
+            <a:off x="6231636" y="3734562"/>
+            <a:ext cx="5454396" cy="2470912"/>
           </a:xfrm>
           <a:prstGeom prst="roundRect">
             <a:avLst>
-              <a:gd name="adj" fmla="val 15999"/>
+              <a:gd name="adj" fmla="val 12335"/>
             </a:avLst>
           </a:prstGeom>
           <a:solidFill>
@@ -8268,7 +8095,7 @@
         </p:nvSpPr>
         <p:spPr>
           <a:xfrm>
-            <a:off x="6414516" y="4008120"/>
+            <a:off x="6414516" y="3844290"/>
             <a:ext cx="5088636" cy="274320"/>
           </a:xfrm>
           <a:prstGeom prst="rect">
@@ -8297,7 +8124,7 @@
                 </a:solidFill>
                 <a:latin typeface="Arial"/>
               </a:rPr>
-              <a:t>КООРДИНАТОР ИЛИ ОБЪЕДИНЕНИЕ ЛИШНИЕ, КОГДА</a:t>
+              <a:t>ДЕШЕВЛЕ ДРУГОЕ СРЕДСТВО, КОГДА</a:t>
             </a:r>
           </a:p>
         </p:txBody>
@@ -8310,8 +8137,8 @@
         </p:nvSpPr>
         <p:spPr>
           <a:xfrm>
-            <a:off x="6414516" y="4282440"/>
-            <a:ext cx="5088636" cy="446024"/>
+            <a:off x="6414516" y="4118610"/>
+            <a:ext cx="5088636" cy="475996"/>
           </a:xfrm>
           <a:prstGeom prst="rect">
             <a:avLst/>
@@ -8326,20 +8153,20 @@
           <a:p>
             <a:pPr algn="l">
               <a:lnSpc>
-                <a:spcPts val="1180"/>
+                <a:spcPts val="1297"/>
               </a:lnSpc>
               <a:spcAft>
                 <a:spcPts val="0"/>
               </a:spcAft>
             </a:pPr>
             <a:r>
-              <a:rPr sz="1000" b="0" i="0">
+              <a:rPr sz="1100" b="0" i="0">
                 <a:solidFill>
                   <a:srgbClr val="141B2E"/>
                 </a:solidFill>
                 <a:latin typeface="Arial"/>
               </a:rPr>
-              <a:t>шаги зависимы — разбиение на роли умножает ошибку: в 17,2 раза без координатора, в 4,4 даже при централизованной проверке</a:t>
+              <a:t>шаги зависимы: разбиение умножает ошибку — в 17,2 раза без координатора, в 4,4 даже при централизованной проверке</a:t>
             </a:r>
           </a:p>
         </p:txBody>
@@ -8352,7 +8179,7 @@
         </p:nvCxnSpPr>
         <p:spPr>
           <a:xfrm>
-            <a:off x="6414516" y="4728464"/>
+            <a:off x="6414516" y="4594605"/>
             <a:ext cx="5088636" cy="0"/>
           </a:xfrm>
           <a:prstGeom prst="line">
@@ -8387,8 +8214,8 @@
         </p:nvSpPr>
         <p:spPr>
           <a:xfrm>
-            <a:off x="6414516" y="4728464"/>
-            <a:ext cx="5088636" cy="446024"/>
+            <a:off x="6414516" y="4594605"/>
+            <a:ext cx="5088636" cy="475996"/>
           </a:xfrm>
           <a:prstGeom prst="rect">
             <a:avLst/>
@@ -8403,20 +8230,38 @@
           <a:p>
             <a:pPr algn="l">
               <a:lnSpc>
-                <a:spcPts val="1180"/>
+                <a:spcPts val="1297"/>
               </a:lnSpc>
               <a:spcAft>
                 <a:spcPts val="0"/>
               </a:spcAft>
             </a:pPr>
             <a:r>
-              <a:rPr sz="1000" b="0" i="0">
+              <a:rPr sz="1100" b="0" i="0">
                 <a:solidFill>
                   <a:srgbClr val="141B2E"/>
                 </a:solidFill>
                 <a:latin typeface="Arial"/>
               </a:rPr>
-              <a:t>лишний слой поверх уже сделанной работы не окупается — координатору нечего делать, кроме как сверять то, что уже сделали другие</a:t>
+              <a:t>кусок один и неделимый: разрез между ролями никому не поручен, и два честных </a:t>
+            </a:r>
+            <a:r>
+              <a:rPr sz="1100" b="0" i="0">
+                <a:solidFill>
+                  <a:srgbClr val="141B2E"/>
+                </a:solidFill>
+                <a:latin typeface="Consolas"/>
+              </a:rPr>
+              <a:t>PASS</a:t>
+            </a:r>
+            <a:r>
+              <a:rPr sz="1100" b="0" i="0">
+                <a:solidFill>
+                  <a:srgbClr val="141B2E"/>
+                </a:solidFill>
+                <a:latin typeface="Arial"/>
+              </a:rPr>
+              <a:t> складываются в картину, которой нет</a:t>
             </a:r>
           </a:p>
         </p:txBody>
@@ -8429,7 +8274,7 @@
         </p:nvCxnSpPr>
         <p:spPr>
           <a:xfrm>
-            <a:off x="6414516" y="5174488"/>
+            <a:off x="6414516" y="5070601"/>
             <a:ext cx="5088636" cy="0"/>
           </a:xfrm>
           <a:prstGeom prst="line">
@@ -8464,8 +8309,8 @@
         </p:nvSpPr>
         <p:spPr>
           <a:xfrm>
-            <a:off x="6414516" y="5174488"/>
-            <a:ext cx="5088636" cy="446024"/>
+            <a:off x="6414516" y="5070601"/>
+            <a:ext cx="5088636" cy="475996"/>
           </a:xfrm>
           <a:prstGeom prst="rect">
             <a:avLst/>
@@ -8480,27 +8325,104 @@
           <a:p>
             <a:pPr algn="l">
               <a:lnSpc>
-                <a:spcPts val="1180"/>
+                <a:spcPts val="1297"/>
               </a:lnSpc>
               <a:spcAft>
                 <a:spcPts val="0"/>
               </a:spcAft>
             </a:pPr>
             <a:r>
-              <a:rPr sz="1000" b="0" i="0">
+              <a:rPr sz="1100" b="0" i="0">
                 <a:solidFill>
                   <a:srgbClr val="141B2E"/>
                 </a:solidFill>
                 <a:latin typeface="Arial"/>
               </a:rPr>
-              <a:t>задача и так дешёвая, а цена пропущенной ошибки низкая — одна роль почти всегда дешевле двух</a:t>
-            </a:r>
-          </a:p>
-        </p:txBody>
-      </p:sp>
-      <p:sp>
-        <p:nvSpPr>
-          <p:cNvPr id="19" name="TextBox 18"/>
+              <a:t>кусок повторяется после каждого из остальных: его место в проверке, которая гоняется сама</a:t>
+            </a:r>
+          </a:p>
+        </p:txBody>
+      </p:sp>
+      <p:cxnSp>
+        <p:nvCxnSpPr>
+          <p:cNvPr id="19" name="Connector 18"/>
+          <p:cNvCxnSpPr/>
+          <p:nvPr/>
+        </p:nvCxnSpPr>
+        <p:spPr>
+          <a:xfrm>
+            <a:off x="6414516" y="5546597"/>
+            <a:ext cx="5088636" cy="0"/>
+          </a:xfrm>
+          <a:prstGeom prst="line">
+            <a:avLst/>
+          </a:prstGeom>
+          <a:ln w="9525">
+            <a:solidFill>
+              <a:srgbClr val="E5EAF0"/>
+            </a:solidFill>
+          </a:ln>
+        </p:spPr>
+        <p:style>
+          <a:lnRef idx="2">
+            <a:schemeClr val="accent1"/>
+          </a:lnRef>
+          <a:fillRef idx="0">
+            <a:schemeClr val="accent1"/>
+          </a:fillRef>
+          <a:effectRef idx="1">
+            <a:schemeClr val="accent1"/>
+          </a:effectRef>
+          <a:fontRef idx="minor">
+            <a:schemeClr val="tx1"/>
+          </a:fontRef>
+        </p:style>
+      </p:cxnSp>
+      <p:sp>
+        <p:nvSpPr>
+          <p:cNvPr id="20" name="TextBox 19"/>
+          <p:cNvSpPr txBox="1"/>
+          <p:nvPr/>
+        </p:nvSpPr>
+        <p:spPr>
+          <a:xfrm>
+            <a:off x="6414516" y="5546597"/>
+            <a:ext cx="5088636" cy="475996"/>
+          </a:xfrm>
+          <a:prstGeom prst="rect">
+            <a:avLst/>
+          </a:prstGeom>
+          <a:noFill/>
+        </p:spPr>
+        <p:txBody>
+          <a:bodyPr wrap="square" lIns="0" rIns="0" tIns="0" bIns="0" anchor="ctr">
+            <a:spAutoFit/>
+          </a:bodyPr>
+          <a:lstStyle/>
+          <a:p>
+            <a:pPr algn="l">
+              <a:lnSpc>
+                <a:spcPts val="1297"/>
+              </a:lnSpc>
+              <a:spcAft>
+                <a:spcPts val="0"/>
+              </a:spcAft>
+            </a:pPr>
+            <a:r>
+              <a:rPr sz="1100" b="0" i="0">
+                <a:solidFill>
+                  <a:srgbClr val="141B2E"/>
+                </a:solidFill>
+                <a:latin typeface="Arial"/>
+              </a:rPr>
+              <a:t>кусок к сроку не нужен вовсе: такой сужают, а ускорять в нём нечего</a:t>
+            </a:r>
+          </a:p>
+        </p:txBody>
+      </p:sp>
+      <p:sp>
+        <p:nvSpPr>
+          <p:cNvPr id="21" name="TextBox 20"/>
           <p:cNvSpPr txBox="1"/>
           <p:nvPr/>
         </p:nvSpPr>
@@ -9169,7 +9091,7 @@
         </p:nvSpPr>
         <p:spPr>
           <a:xfrm>
-            <a:off x="502920" y="1374902"/>
+            <a:off x="502920" y="1347927"/>
             <a:ext cx="82296" cy="746760"/>
           </a:xfrm>
           <a:prstGeom prst="roundRect">
@@ -9215,7 +9137,7 @@
         </p:nvSpPr>
         <p:spPr>
           <a:xfrm>
-            <a:off x="859536" y="1502918"/>
+            <a:off x="859536" y="1475943"/>
             <a:ext cx="10643616" cy="490727"/>
           </a:xfrm>
           <a:prstGeom prst="rect">
@@ -9257,12 +9179,12 @@
         </p:nvSpPr>
         <p:spPr>
           <a:xfrm>
-            <a:off x="502920" y="2424049"/>
-            <a:ext cx="11183112" cy="2771775"/>
+            <a:off x="502920" y="2329637"/>
+            <a:ext cx="11183112" cy="2974086"/>
           </a:xfrm>
           <a:prstGeom prst="roundRect">
             <a:avLst>
-              <a:gd name="adj" fmla="val 10996"/>
+              <a:gd name="adj" fmla="val 10248"/>
             </a:avLst>
           </a:prstGeom>
           <a:solidFill>
@@ -9305,7 +9227,7 @@
         </p:nvSpPr>
         <p:spPr>
           <a:xfrm>
-            <a:off x="722376" y="2643505"/>
+            <a:off x="722376" y="2549093"/>
             <a:ext cx="329184" cy="532638"/>
           </a:xfrm>
           <a:prstGeom prst="rect">
@@ -9347,7 +9269,7 @@
         </p:nvSpPr>
         <p:spPr>
           <a:xfrm>
-            <a:off x="1106424" y="2643505"/>
+            <a:off x="1106424" y="2549093"/>
             <a:ext cx="10360152" cy="532638"/>
           </a:xfrm>
           <a:prstGeom prst="rect">
@@ -9389,8 +9311,8 @@
         </p:nvSpPr>
         <p:spPr>
           <a:xfrm>
-            <a:off x="722376" y="3176143"/>
-            <a:ext cx="329184" cy="532638"/>
+            <a:off x="722376" y="3081731"/>
+            <a:ext cx="329184" cy="734949"/>
           </a:xfrm>
           <a:prstGeom prst="rect">
             <a:avLst/>
@@ -9431,8 +9353,8 @@
         </p:nvSpPr>
         <p:spPr>
           <a:xfrm>
-            <a:off x="1106424" y="3176143"/>
-            <a:ext cx="10360152" cy="532638"/>
+            <a:off x="1106424" y="3081731"/>
+            <a:ext cx="10360152" cy="734949"/>
           </a:xfrm>
           <a:prstGeom prst="rect">
             <a:avLst/>
@@ -9460,7 +9382,7 @@
                 </a:solidFill>
                 <a:latin typeface="Arial"/>
               </a:rPr>
-              <a:t>Он просит проверить отдельным агентом. Это работает немедленно, без единой строки настройки: агент получает задачу в собственном контекстном окне, истории рассуждений не видит, возвращает только итог.</a:t>
+              <a:t>Он просит проверить отдельным агентом — делает так каждый раз с тех пор, как начал делегировать. Это работает немедленно, без единой строки настройки: агент получает задачу в собственном контекстном окне, истории рассуждений не видит, возвращает только итог.</a:t>
             </a:r>
           </a:p>
         </p:txBody>
@@ -9473,7 +9395,7 @@
         </p:nvSpPr>
         <p:spPr>
           <a:xfrm>
-            <a:off x="722376" y="3708781"/>
+            <a:off x="722376" y="3816680"/>
             <a:ext cx="329184" cy="734949"/>
           </a:xfrm>
           <a:prstGeom prst="rect">
@@ -9515,7 +9437,7 @@
         </p:nvSpPr>
         <p:spPr>
           <a:xfrm>
-            <a:off x="1106424" y="3708781"/>
+            <a:off x="1106424" y="3816680"/>
             <a:ext cx="10360152" cy="734949"/>
           </a:xfrm>
           <a:prstGeom prst="rect">
@@ -9557,7 +9479,7 @@
         </p:nvSpPr>
         <p:spPr>
           <a:xfrm>
-            <a:off x="722376" y="4443730"/>
+            <a:off x="722376" y="4551629"/>
             <a:ext cx="329184" cy="532638"/>
           </a:xfrm>
           <a:prstGeom prst="rect">
@@ -9599,7 +9521,7 @@
         </p:nvSpPr>
         <p:spPr>
           <a:xfrm>
-            <a:off x="1106424" y="4443730"/>
+            <a:off x="1106424" y="4551629"/>
             <a:ext cx="10360152" cy="532638"/>
           </a:xfrm>
           <a:prstGeom prst="rect">
@@ -9641,7 +9563,7 @@
         </p:nvSpPr>
         <p:spPr>
           <a:xfrm>
-            <a:off x="502920" y="5498211"/>
+            <a:off x="502920" y="5538673"/>
             <a:ext cx="82296" cy="746760"/>
           </a:xfrm>
           <a:prstGeom prst="roundRect">
@@ -9687,7 +9609,7 @@
         </p:nvSpPr>
         <p:spPr>
           <a:xfrm>
-            <a:off x="859536" y="5626227"/>
+            <a:off x="859536" y="5666689"/>
             <a:ext cx="10643616" cy="490727"/>
           </a:xfrm>
           <a:prstGeom prst="rect">
